--- a/artifacts/slides/copilot-runway.pptx
+++ b/artifacts/slides/copilot-runway.pptx
@@ -516,7 +516,7 @@
               <a:t>Computer Use: what it does, where value comes from, and the bounded control story.,Exact lifecycle: public-preview. Public preview in local Copilot CLI and Copilot app sessions on Windows and macOS.,Verification date: 2026-10-14. Evidence older than 30 days requires re-review.,This is independent enablement for a controlled pilot, not production certification or customer-specific approval.,Cost detail: Enterprise Copilot CLI model interactions consume AI credits. The reviewed computer-use documentation does not quote a separate computer-use tariff. Check the actual tenant and model usage before quoting a demo cost.,Explicit assumptions:
 Existing approved Copilot seat.
 Synthetic local document; no paid external application transaction.
-AI credits are usage-based; one enterprise AI credit equals USD 0.01.,Complete assessment: https://github.com/hammadorg93/copilot-runway/blob/main/features/computer-use/assessment.md,Presenter runbook: https://github.com/hammadorg93/copilot-runway/blob/main/demos/computer-use/README.md,Kit validation: kit-tested. Live feature validation: not-run.,Remote cleanup: Disable /computer; review any saved app approvals separately. A local reset cannot revoke permissions in an active session.,Primary sources:
+AI credits are usage-based; one enterprise AI credit equals USD 0.01.,Complete assessment: https://github.com/aj-enns/copilot-runway/blob/main/features/computer-use/assessment.md,Presenter runbook: https://github.com/aj-enns/copilot-runway/blob/main/demos/computer-use/README.md,Kit validation: kit-tested. Live feature validation: not-run.,Remote cleanup: Disable /computer; review any saved app approvals separately. A local reset cannot revoke permissions in an active session.,Primary sources:
 About computer use in GitHub Copilot: https://docs.github.com/en/copilot/concepts/agents/computer-use
 Usage-based billing for organizations and enterprises: https://docs.github.com/en/copilot/concepts/billing-and-usage/organizations-and-enterprises/billing
 GitHub Copilot licenses: https://docs.github.com/en/billing/concepts/product-billing/github-copilot-licenses
@@ -613,7 +613,7 @@
               <a:t>Copilot Memory: pilot decision, evidence gaps, cost assumptions, and how to start the repeatable demo kit.,Exact lifecycle: public-preview. Public preview across supported Copilot surfaces; repository facts and user preferences have different scopes.,Verification date: 2026-10-14. Evidence older than 30 days requires re-review.,This is independent enablement for a controlled pilot, not production certification or customer-specific approval.,Cost detail: The reviewed Memory documentation does not specify a standalone memory-storage tariff. The underlying CLI, cloud-agent, and other model interactions still follow their billing model. Do not describe memory as unlimited or free because no separate price is listed.,Explicit assumptions:
 An eligible account with Memory allowed.
 One non-sensitive repository fact in a throwaway demo repository.
-No personal information, customer information, or user-scoped preference is stored.,Complete assessment: https://github.com/hammadorg93/copilot-runway/blob/main/features/copilot-memory/assessment.md,Presenter runbook: https://github.com/hammadorg93/copilot-runway/blob/main/demos/copilot-memory/README.md,Kit validation: kit-tested. Live feature validation: not-run.,Remote cleanup: With the repository owner's authorization, delete only this demo fact in repository Settings &gt; Copilot &gt; Memory. Never clear all memories.,Primary sources:
+No personal information, customer information, or user-scoped preference is stored.,Complete assessment: https://github.com/aj-enns/copilot-runway/blob/main/features/copilot-memory/assessment.md,Presenter runbook: https://github.com/aj-enns/copilot-runway/blob/main/demos/copilot-memory/README.md,Kit validation: kit-tested. Live feature validation: not-run.,Remote cleanup: With the repository owner's authorization, delete only this demo fact in repository Settings &gt; Copilot &gt; Memory. Never clear all memories.,Primary sources:
 About GitHub Copilot Memory: https://docs.github.com/en/copilot/concepts/agents/copilot-memory
 Usage-based billing for organizations and enterprises: https://docs.github.com/en/copilot/concepts/billing-and-usage/organizations-and-enterprises/billing
 GitHub Copilot licenses: https://docs.github.com/en/billing/concepts/product-billing/github-copilot-licenses
@@ -708,7 +708,7 @@
               <a:t>Autopilot Mode: what it does, where value comes from, and the bounded control story.,Exact lifecycle: experimental. The official CLI README lists Autopilot under experimental features; client behavior and limits should be rechecked.,Verification date: 2026-10-14. Evidence older than 30 days requires re-review.,This is independent enablement for a controlled pilot, not production certification or customer-specific approval.,Cost detail: Current enterprise billing is token-based AI credits, not a fixed promise of one billable request per task. Autonomous work, retries, and frontier models change cost. The README's legacy premium-request text is not used as enterprise pricing evidence.,Explicit assumptions:
 One synthetic task with a measurable test suite.
 Approved model, effective tenant budget, and no permission bypass.
-A continuation or runtime limit is not evidence of a hard billed-spend cap.,Complete assessment: https://github.com/hammadorg93/copilot-runway/blob/main/features/autopilot/assessment.md,Presenter runbook: https://github.com/hammadorg93/copilot-runway/blob/main/demos/autopilot/README.md,Kit validation: kit-tested. Live feature validation: not-run.,Remote cleanup: No remote state is created by this kit. Stop the session before local reset and return the CLI to the prior mode/settings.,Primary sources:
+A continuation or runtime limit is not evidence of a hard billed-spend cap.,Complete assessment: https://github.com/aj-enns/copilot-runway/blob/main/features/autopilot/assessment.md,Presenter runbook: https://github.com/aj-enns/copilot-runway/blob/main/demos/autopilot/README.md,Kit validation: kit-tested. Live feature validation: not-run.,Remote cleanup: No remote state is created by this kit. Stop the session before local reset and return the CLI to the prior mode/settings.,Primary sources:
 Copilot CLI README: experimental mode: https://github.com/github/copilot-cli/blob/76c3172eb38f5e7537b90b9800a7023d81156438/README.md
 Usage-based billing for organizations and enterprises: https://docs.github.com/en/copilot/concepts/billing-and-usage/organizations-and-enterprises/billing
 Copilot CLI v1.0.97 release notes: https://github.com/github/copilot-cli/releases/tag/v1.0.97
@@ -805,7 +805,7 @@
               <a:t>Autopilot Mode: pilot decision, evidence gaps, cost assumptions, and how to start the repeatable demo kit.,Exact lifecycle: experimental. The official CLI README lists Autopilot under experimental features; client behavior and limits should be rechecked.,Verification date: 2026-10-14. Evidence older than 30 days requires re-review.,This is independent enablement for a controlled pilot, not production certification or customer-specific approval.,Cost detail: Current enterprise billing is token-based AI credits, not a fixed promise of one billable request per task. Autonomous work, retries, and frontier models change cost. The README's legacy premium-request text is not used as enterprise pricing evidence.,Explicit assumptions:
 One synthetic task with a measurable test suite.
 Approved model, effective tenant budget, and no permission bypass.
-A continuation or runtime limit is not evidence of a hard billed-spend cap.,Complete assessment: https://github.com/hammadorg93/copilot-runway/blob/main/features/autopilot/assessment.md,Presenter runbook: https://github.com/hammadorg93/copilot-runway/blob/main/demos/autopilot/README.md,Kit validation: kit-tested. Live feature validation: not-run.,Remote cleanup: No remote state is created by this kit. Stop the session before local reset and return the CLI to the prior mode/settings.,Primary sources:
+A continuation or runtime limit is not evidence of a hard billed-spend cap.,Complete assessment: https://github.com/aj-enns/copilot-runway/blob/main/features/autopilot/assessment.md,Presenter runbook: https://github.com/aj-enns/copilot-runway/blob/main/demos/autopilot/README.md,Kit validation: kit-tested. Live feature validation: not-run.,Remote cleanup: No remote state is created by this kit. Stop the session before local reset and return the CLI to the prior mode/settings.,Primary sources:
 Copilot CLI README: experimental mode: https://github.com/github/copilot-cli/blob/76c3172eb38f5e7537b90b9800a7023d81156438/README.md
 Usage-based billing for organizations and enterprises: https://docs.github.com/en/copilot/concepts/billing-and-usage/organizations-and-enterprises/billing
 Copilot CLI v1.0.97 release notes: https://github.com/github/copilot-cli/releases/tag/v1.0.97
@@ -902,7 +902,7 @@
               <a:t>Computer Use: pilot decision, evidence gaps, cost assumptions, and how to start the repeatable demo kit.,Exact lifecycle: public-preview. Public preview in local Copilot CLI and Copilot app sessions on Windows and macOS.,Verification date: 2026-10-14. Evidence older than 30 days requires re-review.,This is independent enablement for a controlled pilot, not production certification or customer-specific approval.,Cost detail: Enterprise Copilot CLI model interactions consume AI credits. The reviewed computer-use documentation does not quote a separate computer-use tariff. Check the actual tenant and model usage before quoting a demo cost.,Explicit assumptions:
 Existing approved Copilot seat.
 Synthetic local document; no paid external application transaction.
-AI credits are usage-based; one enterprise AI credit equals USD 0.01.,Complete assessment: https://github.com/hammadorg93/copilot-runway/blob/main/features/computer-use/assessment.md,Presenter runbook: https://github.com/hammadorg93/copilot-runway/blob/main/demos/computer-use/README.md,Kit validation: kit-tested. Live feature validation: not-run.,Remote cleanup: Disable /computer; review any saved app approvals separately. A local reset cannot revoke permissions in an active session.,Primary sources:
+AI credits are usage-based; one enterprise AI credit equals USD 0.01.,Complete assessment: https://github.com/aj-enns/copilot-runway/blob/main/features/computer-use/assessment.md,Presenter runbook: https://github.com/aj-enns/copilot-runway/blob/main/demos/computer-use/README.md,Kit validation: kit-tested. Live feature validation: not-run.,Remote cleanup: Disable /computer; review any saved app approvals separately. A local reset cannot revoke permissions in an active session.,Primary sources:
 About computer use in GitHub Copilot: https://docs.github.com/en/copilot/concepts/agents/computer-use
 Usage-based billing for organizations and enterprises: https://docs.github.com/en/copilot/concepts/billing-and-usage/organizations-and-enterprises/billing
 GitHub Copilot licenses: https://docs.github.com/en/billing/concepts/product-billing/github-copilot-licenses
@@ -999,7 +999,7 @@
               <a:t>Dynamic Workflows: what it does, where value comes from, and the bounded control story.,Exact lifecycle: experimental. Official SDK documentation calls the API experimental. This is not GitHub Actions or a verified public-preview SKU.,Verification date: 2026-10-14. Evidence older than 30 days requires re-review.,This is independent enablement for a controlled pilot, not production certification or customer-specific approval.,Cost detail: AI credits cover the workflow subagent tree. The documented maxAiCredits ceiling is soft and post-paid, so parallel work can settle above it. Schema retries count as additional admitted subagents. No guessed runtime budget is declared in the demo extension.,Explicit assumptions:
 An execution-eligible account and compatible SDK.
 Two synthetic application inputs; no nested workflows.
-Presenter chooses an approved per-run limit; limits are not an enterprise billing hard stop.,Complete assessment: https://github.com/hammadorg93/copilot-runway/blob/main/features/dynamic-workflows/assessment.md,Presenter runbook: https://github.com/hammadorg93/copilot-runway/blob/main/demos/dynamic-workflows/README.md,Kit validation: kit-tested. Live feature validation: not-run.,Remote cleanup: Cancel any active workflow by its exact run ID. Reset only local fixture files; retained workflow journals are separate state.,Primary sources:
+Presenter chooses an approved per-run limit; limits are not an enterprise billing hard stop.,Complete assessment: https://github.com/aj-enns/copilot-runway/blob/main/features/dynamic-workflows/assessment.md,Presenter runbook: https://github.com/aj-enns/copilot-runway/blob/main/demos/dynamic-workflows/README.md,Kit validation: kit-tested. Live feature validation: not-run.,Remote cleanup: Cancel any active workflow by its exact run ID. Reset only local fixture files; retained workflow journals are separate state.,Primary sources:
 Copilot SDK: Dynamic Workflows (experimental API): https://github.com/github/copilot-sdk/blob/ad20f9f4319d48000b895c9c4180242c2232e1ab/nodejs/docs/workflows.md
 Usage-based billing for organizations and enterprises: https://docs.github.com/en/copilot/concepts/billing-and-usage/organizations-and-enterprises/billing
 GitHub custom agents configuration and tool restrictions: https://docs.github.com/en/copilot/reference/custom-agents-configuration
@@ -1095,7 +1095,7 @@
               <a:t>Dynamic Workflows: pilot decision, evidence gaps, cost assumptions, and how to start the repeatable demo kit.,Exact lifecycle: experimental. Official SDK documentation calls the API experimental. This is not GitHub Actions or a verified public-preview SKU.,Verification date: 2026-10-14. Evidence older than 30 days requires re-review.,This is independent enablement for a controlled pilot, not production certification or customer-specific approval.,Cost detail: AI credits cover the workflow subagent tree. The documented maxAiCredits ceiling is soft and post-paid, so parallel work can settle above it. Schema retries count as additional admitted subagents. No guessed runtime budget is declared in the demo extension.,Explicit assumptions:
 An execution-eligible account and compatible SDK.
 Two synthetic application inputs; no nested workflows.
-Presenter chooses an approved per-run limit; limits are not an enterprise billing hard stop.,Complete assessment: https://github.com/hammadorg93/copilot-runway/blob/main/features/dynamic-workflows/assessment.md,Presenter runbook: https://github.com/hammadorg93/copilot-runway/blob/main/demos/dynamic-workflows/README.md,Kit validation: kit-tested. Live feature validation: not-run.,Remote cleanup: Cancel any active workflow by its exact run ID. Reset only local fixture files; retained workflow journals are separate state.,Primary sources:
+Presenter chooses an approved per-run limit; limits are not an enterprise billing hard stop.,Complete assessment: https://github.com/aj-enns/copilot-runway/blob/main/features/dynamic-workflows/assessment.md,Presenter runbook: https://github.com/aj-enns/copilot-runway/blob/main/demos/dynamic-workflows/README.md,Kit validation: kit-tested. Live feature validation: not-run.,Remote cleanup: Cancel any active workflow by its exact run ID. Reset only local fixture files; retained workflow journals are separate state.,Primary sources:
 Copilot SDK: Dynamic Workflows (experimental API): https://github.com/github/copilot-sdk/blob/ad20f9f4319d48000b895c9c4180242c2232e1ab/nodejs/docs/workflows.md
 Usage-based billing for organizations and enterprises: https://docs.github.com/en/copilot/concepts/billing-and-usage/organizations-and-enterprises/billing
 GitHub custom agents configuration and tool restrictions: https://docs.github.com/en/copilot/reference/custom-agents-configuration
@@ -1191,7 +1191,7 @@
               <a:t>GitHub Agentic Workflows: what it does, where value comes from, and the bounded control story.,Exact lifecycle: technical-preview. The official announcement names a technical preview. Recheck current lifecycle before adoption.,Verification date: 2026-10-14. Evidence older than 30 days requires re-review.,This is independent enablement for a controlled pilot, not production certification or customer-specific approval.,Cost detail: Copilot-engine inference is governed by its billing entity; other engines have their own provider charges. Private-repository Actions usage can consume included minutes and incur overage. The deterministic daily scan does not call an AI model.,Explicit assumptions:
 GitHub Actions is allowed for this repository.
 AI-engine authentication and budget are administrator-owned.
-No claim that a scheduled workflow is free or that a PAT supplies unlimited usage.,Complete assessment: https://github.com/hammadorg93/copilot-runway/blob/main/features/agentic-workflows/assessment.md,Presenter runbook: https://github.com/hammadorg93/copilot-runway/blob/main/demos/agentic-workflows/README.md,Kit validation: kit-tested. Live feature validation: not-run.,Remote cleanup: Disable the opt-in and cancel only exact demo runs; draft PRs and Actions logs are not removed by a local reset.,Primary sources:
+No claim that a scheduled workflow is free or that a PAT supplies unlimited usage.,Complete assessment: https://github.com/aj-enns/copilot-runway/blob/main/features/agentic-workflows/assessment.md,Presenter runbook: https://github.com/aj-enns/copilot-runway/blob/main/demos/agentic-workflows/README.md,Kit validation: kit-tested. Live feature validation: not-run.,Remote cleanup: Disable the opt-in and cancel only exact demo runs; draft PRs and Actions logs are not removed by a local reset.,Primary sources:
 GitHub Agentic Workflows technical preview announcement: https://github.blog/changelog/2026-02-13-github-agentic-workflows-are-now-in-technical-preview/
 GitHub Agentic Workflows quick start and authentication: https://github.github.io/gh-aw/setup/quick-start/
 Usage-based billing for organizations and enterprises: https://docs.github.com/en/copilot/concepts/billing-and-usage/organizations-and-enterprises/billing
@@ -1287,7 +1287,7 @@
               <a:t>GitHub Agentic Workflows: pilot decision, evidence gaps, cost assumptions, and how to start the repeatable demo kit.,Exact lifecycle: technical-preview. The official announcement names a technical preview. Recheck current lifecycle before adoption.,Verification date: 2026-10-14. Evidence older than 30 days requires re-review.,This is independent enablement for a controlled pilot, not production certification or customer-specific approval.,Cost detail: Copilot-engine inference is governed by its billing entity; other engines have their own provider charges. Private-repository Actions usage can consume included minutes and incur overage. The deterministic daily scan does not call an AI model.,Explicit assumptions:
 GitHub Actions is allowed for this repository.
 AI-engine authentication and budget are administrator-owned.
-No claim that a scheduled workflow is free or that a PAT supplies unlimited usage.,Complete assessment: https://github.com/hammadorg93/copilot-runway/blob/main/features/agentic-workflows/assessment.md,Presenter runbook: https://github.com/hammadorg93/copilot-runway/blob/main/demos/agentic-workflows/README.md,Kit validation: kit-tested. Live feature validation: not-run.,Remote cleanup: Disable the opt-in and cancel only exact demo runs; draft PRs and Actions logs are not removed by a local reset.,Primary sources:
+No claim that a scheduled workflow is free or that a PAT supplies unlimited usage.,Complete assessment: https://github.com/aj-enns/copilot-runway/blob/main/features/agentic-workflows/assessment.md,Presenter runbook: https://github.com/aj-enns/copilot-runway/blob/main/demos/agentic-workflows/README.md,Kit validation: kit-tested. Live feature validation: not-run.,Remote cleanup: Disable the opt-in and cancel only exact demo runs; draft PRs and Actions logs are not removed by a local reset.,Primary sources:
 GitHub Agentic Workflows technical preview announcement: https://github.blog/changelog/2026-02-13-github-agentic-workflows-are-now-in-technical-preview/
 GitHub Agentic Workflows quick start and authentication: https://github.github.io/gh-aw/setup/quick-start/
 Usage-based billing for organizations and enterprises: https://docs.github.com/en/copilot/concepts/billing-and-usage/organizations-and-enterprises/billing
@@ -1385,7 +1385,7 @@
 Inside a Git repository, its owner is billed; outside a repository, select an approved billable owner.
 Cloud product/SKU budgets are separate from bundled AI-credit budgets.
 The documented preview trial entitlement ended in July 2026; do not assume a current free allowance.
-Stopping execution and deleting a stored snapshot are different lifecycle actions.,Complete assessment: https://github.com/hammadorg93/copilot-runway/blob/main/features/cloud-sandboxes/assessment.md,Presenter runbook: https://github.com/hammadorg93/copilot-runway/blob/main/demos/cloud-sandboxes/README.md,Kit validation: kit-tested. Live feature validation: not-run.,Remote cleanup: Stop the exact cloud session and separately review its stored snapshot. The local reset cannot perform cloud cleanup.,Primary sources:
+Stopping execution and deleting a stored snapshot are different lifecycle actions.,Complete assessment: https://github.com/aj-enns/copilot-runway/blob/main/features/cloud-sandboxes/assessment.md,Presenter runbook: https://github.com/aj-enns/copilot-runway/blob/main/demos/cloud-sandboxes/README.md,Kit validation: kit-tested. Live feature validation: not-run.,Remote cleanup: Stop the exact cloud session and separately review its stored snapshot. The local reset cannot perform cloud cleanup.,Primary sources:
 About cloud and local sandboxes for GitHub Copilot: https://docs.github.com/en/copilot/concepts/security-governance-and-network-settings/about-cloud-and-local-sandboxes
 Billing for cloud and local sandboxes for GitHub Copilot: https://docs.github.com/en/billing/concepts/product-billing/cloud-and-local-sandboxes
 Usage-based billing for organizations and enterprises: https://docs.github.com/en/copilot/concepts/billing-and-usage/organizations-and-enterprises/billing
@@ -1482,7 +1482,7 @@
 Inside a Git repository, its owner is billed; outside a repository, select an approved billable owner.
 Cloud product/SKU budgets are separate from bundled AI-credit budgets.
 The documented preview trial entitlement ended in July 2026; do not assume a current free allowance.
-Stopping execution and deleting a stored snapshot are different lifecycle actions.,Complete assessment: https://github.com/hammadorg93/copilot-runway/blob/main/features/cloud-sandboxes/assessment.md,Presenter runbook: https://github.com/hammadorg93/copilot-runway/blob/main/demos/cloud-sandboxes/README.md,Kit validation: kit-tested. Live feature validation: not-run.,Remote cleanup: Stop the exact cloud session and separately review its stored snapshot. The local reset cannot perform cloud cleanup.,Primary sources:
+Stopping execution and deleting a stored snapshot are different lifecycle actions.,Complete assessment: https://github.com/aj-enns/copilot-runway/blob/main/features/cloud-sandboxes/assessment.md,Presenter runbook: https://github.com/aj-enns/copilot-runway/blob/main/demos/cloud-sandboxes/README.md,Kit validation: kit-tested. Live feature validation: not-run.,Remote cleanup: Stop the exact cloud session and separately review its stored snapshot. The local reset cannot perform cloud cleanup.,Primary sources:
 About cloud and local sandboxes for GitHub Copilot: https://docs.github.com/en/copilot/concepts/security-governance-and-network-settings/about-cloud-and-local-sandboxes
 Billing for cloud and local sandboxes for GitHub Copilot: https://docs.github.com/en/billing/concepts/product-billing/cloud-and-local-sandboxes
 Usage-based billing for organizations and enterprises: https://docs.github.com/en/copilot/concepts/billing-and-usage/organizations-and-enterprises/billing
@@ -1577,7 +1577,7 @@
               <a:t>Copilot Memory: what it does, where value comes from, and the bounded control story.,Exact lifecycle: public-preview. Public preview across supported Copilot surfaces; repository facts and user preferences have different scopes.,Verification date: 2026-10-14. Evidence older than 30 days requires re-review.,This is independent enablement for a controlled pilot, not production certification or customer-specific approval.,Cost detail: The reviewed Memory documentation does not specify a standalone memory-storage tariff. The underlying CLI, cloud-agent, and other model interactions still follow their billing model. Do not describe memory as unlimited or free because no separate price is listed.,Explicit assumptions:
 An eligible account with Memory allowed.
 One non-sensitive repository fact in a throwaway demo repository.
-No personal information, customer information, or user-scoped preference is stored.,Complete assessment: https://github.com/hammadorg93/copilot-runway/blob/main/features/copilot-memory/assessment.md,Presenter runbook: https://github.com/hammadorg93/copilot-runway/blob/main/demos/copilot-memory/README.md,Kit validation: kit-tested. Live feature validation: not-run.,Remote cleanup: With the repository owner's authorization, delete only this demo fact in repository Settings &gt; Copilot &gt; Memory. Never clear all memories.,Primary sources:
+No personal information, customer information, or user-scoped preference is stored.,Complete assessment: https://github.com/aj-enns/copilot-runway/blob/main/features/copilot-memory/assessment.md,Presenter runbook: https://github.com/aj-enns/copilot-runway/blob/main/demos/copilot-memory/README.md,Kit validation: kit-tested. Live feature validation: not-run.,Remote cleanup: With the repository owner's authorization, delete only this demo fact in repository Settings &gt; Copilot &gt; Memory. Never clear all memories.,Primary sources:
 About GitHub Copilot Memory: https://docs.github.com/en/copilot/concepts/agents/copilot-memory
 Usage-based billing for organizations and enterprises: https://docs.github.com/en/copilot/concepts/billing-and-usage/organizations-and-enterprises/billing
 GitHub Copilot licenses: https://docs.github.com/en/billing/concepts/product-billing/github-copilot-licenses

--- a/artifacts/slides/copilot-runway.pptx
+++ b/artifacts/slides/copilot-runway.pptx
@@ -12664,13 +12664,13 @@
             <a:r>
               <a:rPr lang="en-US" sz="3000" b="1" dirty="0">
                 <a:solidFill>
-                  <a:srgbClr val="B11F4B"/>
-                </a:solidFill>
-                <a:latin typeface="Aptos" pitchFamily="34" charset="0"/>
-                <a:ea typeface="Aptos" pitchFamily="34" charset="-122"/>
-                <a:cs typeface="Aptos" pitchFamily="34" charset="-120"/>
-              </a:rPr>
-              <a:t>Pilot with conditions</a:t>
+                  <a:srgbClr val="B91C1C"/>
+                </a:solidFill>
+                <a:latin typeface="Aptos" pitchFamily="34" charset="0"/>
+                <a:ea typeface="Aptos" pitchFamily="34" charset="-122"/>
+                <a:cs typeface="Aptos" pitchFamily="34" charset="-120"/>
+              </a:rPr>
+              <a:t>Hold for evidence</a:t>
             </a:r>
             <a:endParaRPr lang="en-US" sz="3000" dirty="0"/>
           </a:p>

--- a/artifacts/slides/copilot-runway.pptx
+++ b/artifacts/slides/copilot-runway.pptx
@@ -5927,13 +5927,13 @@
             <a:r>
               <a:rPr lang="en-US" sz="3000" b="1" dirty="0">
                 <a:solidFill>
-                  <a:srgbClr val="B11F4B"/>
-                </a:solidFill>
-                <a:latin typeface="Aptos" pitchFamily="34" charset="0"/>
-                <a:ea typeface="Aptos" pitchFamily="34" charset="-122"/>
-                <a:cs typeface="Aptos" pitchFamily="34" charset="-120"/>
-              </a:rPr>
-              <a:t>Pilot with conditions</a:t>
+                  <a:srgbClr val="B91C1C"/>
+                </a:solidFill>
+                <a:latin typeface="Aptos" pitchFamily="34" charset="0"/>
+                <a:ea typeface="Aptos" pitchFamily="34" charset="-122"/>
+                <a:cs typeface="Aptos" pitchFamily="34" charset="-120"/>
+              </a:rPr>
+              <a:t>Hold for evidence</a:t>
             </a:r>
             <a:endParaRPr lang="en-US" sz="3000" dirty="0"/>
           </a:p>

--- a/artifacts/slides/copilot-runway.pptx
+++ b/artifacts/slides/copilot-runway.pptx
@@ -15332,13 +15332,13 @@
             <a:r>
               <a:rPr lang="en-US" sz="3000" b="1" dirty="0">
                 <a:solidFill>
-                  <a:srgbClr val="B11F4B"/>
-                </a:solidFill>
-                <a:latin typeface="Aptos" pitchFamily="34" charset="0"/>
-                <a:ea typeface="Aptos" pitchFamily="34" charset="-122"/>
-                <a:cs typeface="Aptos" pitchFamily="34" charset="-120"/>
-              </a:rPr>
-              <a:t>Pilot with conditions</a:t>
+                  <a:srgbClr val="B91C1C"/>
+                </a:solidFill>
+                <a:latin typeface="Aptos" pitchFamily="34" charset="0"/>
+                <a:ea typeface="Aptos" pitchFamily="34" charset="-122"/>
+                <a:cs typeface="Aptos" pitchFamily="34" charset="-120"/>
+              </a:rPr>
+              <a:t>Hold for evidence</a:t>
             </a:r>
             <a:endParaRPr lang="en-US" sz="3000" dirty="0"/>
           </a:p>

--- a/artifacts/slides/copilot-runway.pptx
+++ b/artifacts/slides/copilot-runway.pptx
@@ -7433,13 +7433,13 @@
             <a:r>
               <a:rPr lang="en-US" sz="3000" b="1" dirty="0">
                 <a:solidFill>
-                  <a:srgbClr val="B11F4B"/>
-                </a:solidFill>
-                <a:latin typeface="Aptos" pitchFamily="34" charset="0"/>
-                <a:ea typeface="Aptos" pitchFamily="34" charset="-122"/>
-                <a:cs typeface="Aptos" pitchFamily="34" charset="-120"/>
-              </a:rPr>
-              <a:t>Pilot with conditions</a:t>
+                  <a:srgbClr val="B91C1C"/>
+                </a:solidFill>
+                <a:latin typeface="Aptos" pitchFamily="34" charset="0"/>
+                <a:ea typeface="Aptos" pitchFamily="34" charset="-122"/>
+                <a:cs typeface="Aptos" pitchFamily="34" charset="-120"/>
+              </a:rPr>
+              <a:t>Hold for evidence</a:t>
             </a:r>
             <a:endParaRPr lang="en-US" sz="3000" dirty="0"/>
           </a:p>

--- a/artifacts/slides/copilot-runway.pptx
+++ b/artifacts/slides/copilot-runway.pptx
@@ -3294,13 +3294,13 @@
             <a:r>
               <a:rPr lang="en-US" sz="3000" b="1" dirty="0">
                 <a:solidFill>
-                  <a:srgbClr val="B11F4B"/>
-                </a:solidFill>
-                <a:latin typeface="Aptos" pitchFamily="34" charset="0"/>
-                <a:ea typeface="Aptos" pitchFamily="34" charset="-122"/>
-                <a:cs typeface="Aptos" pitchFamily="34" charset="-120"/>
-              </a:rPr>
-              <a:t>Pilot with conditions</a:t>
+                  <a:srgbClr val="B91C1C"/>
+                </a:solidFill>
+                <a:latin typeface="Aptos" pitchFamily="34" charset="0"/>
+                <a:ea typeface="Aptos" pitchFamily="34" charset="-122"/>
+                <a:cs typeface="Aptos" pitchFamily="34" charset="-120"/>
+              </a:rPr>
+              <a:t>Hold for evidence</a:t>
             </a:r>
             <a:endParaRPr lang="en-US" sz="3000" dirty="0"/>
           </a:p>
